--- a/generated_onenote_pages/02_Engineering_Handbook/05_Testing_Strategy__testing-pyramid.pptx
+++ b/generated_onenote_pages/02_Engineering_Handbook/05_Testing_Strategy__testing-pyramid.pptx
@@ -3126,6 +3126,11 @@
         <p:txBody>
           <a:bodyPr/>
           <a:lstStyle/>
+          <a:p>
+            <a:r>
+              <a:t>Attached to the "Testing Strategy" engineering standard in the Engineering Handbook section, owned by Quality Engineering.</a:t>
+            </a:r>
+          </a:p>
           <a:p>
             <a:r>
               <a:t>Deck used in the engineering guild talk on testing.</a:t>
